--- a/catalog/samples/scenario_table.pptx
+++ b/catalog/samples/scenario_table.pptx
@@ -1472,7 +1472,7 @@
           </a:p>
           <a:p>
             <a:r>
-              <a:t>  "template_sha256": "940ef355e560d40e18f716038fe444a88a6e2a6c228e23e07d2c774771de405b"</a:t>
+              <a:t>  "template_sha256": "5694c1628a98813eee3b6f59cd72612a98aab35d30359b725241bde445a0926a"</a:t>
             </a:r>
           </a:p>
           <a:p>
